--- a/youtube_ranking_20260531.pptx
+++ b/youtube_ranking_20260531.pptx
@@ -3258,6 +3258,30 @@
           </a:p>
         </p:txBody>
       </p:sp>
+      <p:pic>
+        <p:nvPicPr>
+          <p:cNvPr id="6" name="Picture 5" descr="zundamon-an.gif"/>
+          <p:cNvPicPr>
+            <a:picLocks noChangeAspect="1"/>
+          </p:cNvPicPr>
+          <p:nvPr/>
+        </p:nvPicPr>
+        <p:blipFill>
+          <a:blip r:embed="rId2"/>
+          <a:stretch>
+            <a:fillRect/>
+          </a:stretch>
+        </p:blipFill>
+        <p:spPr>
+          <a:xfrm>
+            <a:off x="7726680" y="3726180"/>
+            <a:ext cx="1371600" cy="1371600"/>
+          </a:xfrm>
+          <a:prstGeom prst="rect">
+            <a:avLst/>
+          </a:prstGeom>
+        </p:spPr>
+      </p:pic>
     </p:spTree>
   </p:cSld>
   <p:clrMapOvr>
@@ -3573,7 +3597,7 @@
                 </a:solidFill>
                 <a:latin typeface="Arial"/>
               </a:rPr>
-              <a:t>⏱ 1:21:05  ·  📅 公開38時間前</a:t>
+              <a:t>⏱ 1:21:05  ·  📅 公開39時間前</a:t>
             </a:r>
           </a:p>
         </p:txBody>
@@ -3613,6 +3637,30 @@
           </a:p>
         </p:txBody>
       </p:sp>
+      <p:pic>
+        <p:nvPicPr>
+          <p:cNvPr id="12" name="Picture 11" descr="zundamon-an.gif"/>
+          <p:cNvPicPr>
+            <a:picLocks noChangeAspect="1"/>
+          </p:cNvPicPr>
+          <p:nvPr/>
+        </p:nvPicPr>
+        <p:blipFill>
+          <a:blip r:embed="rId5"/>
+          <a:stretch>
+            <a:fillRect/>
+          </a:stretch>
+        </p:blipFill>
+        <p:spPr>
+          <a:xfrm>
+            <a:off x="7726680" y="3726180"/>
+            <a:ext cx="1371600" cy="1371600"/>
+          </a:xfrm>
+          <a:prstGeom prst="rect">
+            <a:avLst/>
+          </a:prstGeom>
+        </p:spPr>
+      </p:pic>
     </p:spTree>
   </p:cSld>
   <p:clrMapOvr>
@@ -3909,7 +3957,7 @@
                 </a:solidFill>
                 <a:latin typeface="Arial"/>
               </a:rPr>
-              <a:t>👁 925,951  👍 81,759  💬 6,339  ⏱ 3:52  📅 公開36時間前</a:t>
+              <a:t>👁 925,951  👍 81,759  💬 6,339  ⏱ 3:52  📅 公開38時間前</a:t>
             </a:r>
           </a:p>
         </p:txBody>
@@ -3984,6 +4032,30 @@
           </a:p>
         </p:txBody>
       </p:sp>
+      <p:pic>
+        <p:nvPicPr>
+          <p:cNvPr id="12" name="Picture 11" descr="zundamon-an.gif"/>
+          <p:cNvPicPr>
+            <a:picLocks noChangeAspect="1"/>
+          </p:cNvPicPr>
+          <p:nvPr/>
+        </p:nvPicPr>
+        <p:blipFill>
+          <a:blip r:embed="rId5"/>
+          <a:stretch>
+            <a:fillRect/>
+          </a:stretch>
+        </p:blipFill>
+        <p:spPr>
+          <a:xfrm>
+            <a:off x="7726680" y="3726180"/>
+            <a:ext cx="1371600" cy="1371600"/>
+          </a:xfrm>
+          <a:prstGeom prst="rect">
+            <a:avLst/>
+          </a:prstGeom>
+        </p:spPr>
+      </p:pic>
     </p:spTree>
   </p:cSld>
   <p:clrMapOvr>
@@ -9363,7 +9435,7 @@
                 </a:solidFill>
                 <a:latin typeface="Arial"/>
               </a:rPr>
-              <a:t>⏱ 1:02:21  ·  📅 公開20時間前</a:t>
+              <a:t>⏱ 1:02:21  ·  📅 公開22時間前</a:t>
             </a:r>
           </a:p>
         </p:txBody>
@@ -9398,11 +9470,35 @@
                 </a:solidFill>
                 <a:latin typeface="Arial"/>
               </a:rPr>
-              <a:t>💡 公開20時間で急上昇入り！　10万再生突破の話題作　いいね率2.8%と好評価</a:t>
-            </a:r>
-          </a:p>
-        </p:txBody>
-      </p:sp>
+              <a:t>💡 公開22時間で急上昇入り！　10万再生突破の話題作　いいね率2.8%と好評価</a:t>
+            </a:r>
+          </a:p>
+        </p:txBody>
+      </p:sp>
+      <p:pic>
+        <p:nvPicPr>
+          <p:cNvPr id="12" name="Picture 11" descr="zundamon-an.gif"/>
+          <p:cNvPicPr>
+            <a:picLocks noChangeAspect="1"/>
+          </p:cNvPicPr>
+          <p:nvPr/>
+        </p:nvPicPr>
+        <p:blipFill>
+          <a:blip r:embed="rId5"/>
+          <a:stretch>
+            <a:fillRect/>
+          </a:stretch>
+        </p:blipFill>
+        <p:spPr>
+          <a:xfrm>
+            <a:off x="7726680" y="3726180"/>
+            <a:ext cx="1371600" cy="1371600"/>
+          </a:xfrm>
+          <a:prstGeom prst="rect">
+            <a:avLst/>
+          </a:prstGeom>
+        </p:spPr>
+      </p:pic>
     </p:spTree>
   </p:cSld>
   <p:clrMapOvr>
@@ -9718,7 +9814,7 @@
                 </a:solidFill>
                 <a:latin typeface="Arial"/>
               </a:rPr>
-              <a:t>⏱ 4:18  ·  📅 公開58時間前</a:t>
+              <a:t>⏱ 4:18  ·  📅 公開60時間前</a:t>
             </a:r>
           </a:p>
         </p:txBody>
@@ -9758,6 +9854,30 @@
           </a:p>
         </p:txBody>
       </p:sp>
+      <p:pic>
+        <p:nvPicPr>
+          <p:cNvPr id="12" name="Picture 11" descr="zundamon-an.gif"/>
+          <p:cNvPicPr>
+            <a:picLocks noChangeAspect="1"/>
+          </p:cNvPicPr>
+          <p:nvPr/>
+        </p:nvPicPr>
+        <p:blipFill>
+          <a:blip r:embed="rId5"/>
+          <a:stretch>
+            <a:fillRect/>
+          </a:stretch>
+        </p:blipFill>
+        <p:spPr>
+          <a:xfrm>
+            <a:off x="7726680" y="3726180"/>
+            <a:ext cx="1371600" cy="1371600"/>
+          </a:xfrm>
+          <a:prstGeom prst="rect">
+            <a:avLst/>
+          </a:prstGeom>
+        </p:spPr>
+      </p:pic>
     </p:spTree>
   </p:cSld>
   <p:clrMapOvr>
@@ -10073,7 +10193,7 @@
                 </a:solidFill>
                 <a:latin typeface="Arial"/>
               </a:rPr>
-              <a:t>⏱ 5:30:41  ·  📅 公開27時間前</a:t>
+              <a:t>⏱ 5:30:41  ·  📅 公開28時間前</a:t>
             </a:r>
           </a:p>
         </p:txBody>
@@ -10113,6 +10233,30 @@
           </a:p>
         </p:txBody>
       </p:sp>
+      <p:pic>
+        <p:nvPicPr>
+          <p:cNvPr id="12" name="Picture 11" descr="zundamon-an.gif"/>
+          <p:cNvPicPr>
+            <a:picLocks noChangeAspect="1"/>
+          </p:cNvPicPr>
+          <p:nvPr/>
+        </p:nvPicPr>
+        <p:blipFill>
+          <a:blip r:embed="rId5"/>
+          <a:stretch>
+            <a:fillRect/>
+          </a:stretch>
+        </p:blipFill>
+        <p:spPr>
+          <a:xfrm>
+            <a:off x="7726680" y="3726180"/>
+            <a:ext cx="1371600" cy="1371600"/>
+          </a:xfrm>
+          <a:prstGeom prst="rect">
+            <a:avLst/>
+          </a:prstGeom>
+        </p:spPr>
+      </p:pic>
     </p:spTree>
   </p:cSld>
   <p:clrMapOvr>
@@ -10428,7 +10572,7 @@
                 </a:solidFill>
                 <a:latin typeface="Arial"/>
               </a:rPr>
-              <a:t>⏱ 3:12  ·  📅 公開43時間前</a:t>
+              <a:t>⏱ 3:12  ·  📅 公開45時間前</a:t>
             </a:r>
           </a:p>
         </p:txBody>
@@ -10468,6 +10612,30 @@
           </a:p>
         </p:txBody>
       </p:sp>
+      <p:pic>
+        <p:nvPicPr>
+          <p:cNvPr id="12" name="Picture 11" descr="zundamon-an.gif"/>
+          <p:cNvPicPr>
+            <a:picLocks noChangeAspect="1"/>
+          </p:cNvPicPr>
+          <p:nvPr/>
+        </p:nvPicPr>
+        <p:blipFill>
+          <a:blip r:embed="rId5"/>
+          <a:stretch>
+            <a:fillRect/>
+          </a:stretch>
+        </p:blipFill>
+        <p:spPr>
+          <a:xfrm>
+            <a:off x="7726680" y="3726180"/>
+            <a:ext cx="1371600" cy="1371600"/>
+          </a:xfrm>
+          <a:prstGeom prst="rect">
+            <a:avLst/>
+          </a:prstGeom>
+        </p:spPr>
+      </p:pic>
     </p:spTree>
   </p:cSld>
   <p:clrMapOvr>
@@ -10783,7 +10951,7 @@
                 </a:solidFill>
                 <a:latin typeface="Arial"/>
               </a:rPr>
-              <a:t>⏱ 33:44  ·  📅 公開22時間前</a:t>
+              <a:t>⏱ 33:44  ·  📅 公開23時間前</a:t>
             </a:r>
           </a:p>
         </p:txBody>
@@ -10818,11 +10986,35 @@
                 </a:solidFill>
                 <a:latin typeface="Arial"/>
               </a:rPr>
-              <a:t>💡 公開22時間で急上昇入り！　10万再生突破の話題作</a:t>
-            </a:r>
-          </a:p>
-        </p:txBody>
-      </p:sp>
+              <a:t>💡 公開23時間で急上昇入り！　10万再生突破の話題作</a:t>
+            </a:r>
+          </a:p>
+        </p:txBody>
+      </p:sp>
+      <p:pic>
+        <p:nvPicPr>
+          <p:cNvPr id="12" name="Picture 11" descr="zundamon-an.gif"/>
+          <p:cNvPicPr>
+            <a:picLocks noChangeAspect="1"/>
+          </p:cNvPicPr>
+          <p:nvPr/>
+        </p:nvPicPr>
+        <p:blipFill>
+          <a:blip r:embed="rId5"/>
+          <a:stretch>
+            <a:fillRect/>
+          </a:stretch>
+        </p:blipFill>
+        <p:spPr>
+          <a:xfrm>
+            <a:off x="7726680" y="3726180"/>
+            <a:ext cx="1371600" cy="1371600"/>
+          </a:xfrm>
+          <a:prstGeom prst="rect">
+            <a:avLst/>
+          </a:prstGeom>
+        </p:spPr>
+      </p:pic>
     </p:spTree>
   </p:cSld>
   <p:clrMapOvr>
@@ -11138,7 +11330,7 @@
                 </a:solidFill>
                 <a:latin typeface="Arial"/>
               </a:rPr>
-              <a:t>⏱ 4:04  ·  📅 公開37時間前</a:t>
+              <a:t>⏱ 4:04  ·  📅 公開38時間前</a:t>
             </a:r>
           </a:p>
         </p:txBody>
@@ -11178,6 +11370,30 @@
           </a:p>
         </p:txBody>
       </p:sp>
+      <p:pic>
+        <p:nvPicPr>
+          <p:cNvPr id="12" name="Picture 11" descr="zundamon-an.gif"/>
+          <p:cNvPicPr>
+            <a:picLocks noChangeAspect="1"/>
+          </p:cNvPicPr>
+          <p:nvPr/>
+        </p:nvPicPr>
+        <p:blipFill>
+          <a:blip r:embed="rId5"/>
+          <a:stretch>
+            <a:fillRect/>
+          </a:stretch>
+        </p:blipFill>
+        <p:spPr>
+          <a:xfrm>
+            <a:off x="7726680" y="3726180"/>
+            <a:ext cx="1371600" cy="1371600"/>
+          </a:xfrm>
+          <a:prstGeom prst="rect">
+            <a:avLst/>
+          </a:prstGeom>
+        </p:spPr>
+      </p:pic>
     </p:spTree>
   </p:cSld>
   <p:clrMapOvr>
@@ -11493,7 +11709,7 @@
                 </a:solidFill>
                 <a:latin typeface="Arial"/>
               </a:rPr>
-              <a:t>⏱ 54:36  ·  📅 公開39時間前</a:t>
+              <a:t>⏱ 54:36  ·  📅 公開41時間前</a:t>
             </a:r>
           </a:p>
         </p:txBody>
@@ -11533,6 +11749,30 @@
           </a:p>
         </p:txBody>
       </p:sp>
+      <p:pic>
+        <p:nvPicPr>
+          <p:cNvPr id="12" name="Picture 11" descr="zundamon-an.gif"/>
+          <p:cNvPicPr>
+            <a:picLocks noChangeAspect="1"/>
+          </p:cNvPicPr>
+          <p:nvPr/>
+        </p:nvPicPr>
+        <p:blipFill>
+          <a:blip r:embed="rId5"/>
+          <a:stretch>
+            <a:fillRect/>
+          </a:stretch>
+        </p:blipFill>
+        <p:spPr>
+          <a:xfrm>
+            <a:off x="7726680" y="3726180"/>
+            <a:ext cx="1371600" cy="1371600"/>
+          </a:xfrm>
+          <a:prstGeom prst="rect">
+            <a:avLst/>
+          </a:prstGeom>
+        </p:spPr>
+      </p:pic>
     </p:spTree>
   </p:cSld>
   <p:clrMapOvr>
@@ -11848,7 +12088,7 @@
                 </a:solidFill>
                 <a:latin typeface="Arial"/>
               </a:rPr>
-              <a:t>⏱ 4:39  ·  📅 公開34時間前</a:t>
+              <a:t>⏱ 4:39  ·  📅 公開36時間前</a:t>
             </a:r>
           </a:p>
         </p:txBody>
@@ -11888,6 +12128,30 @@
           </a:p>
         </p:txBody>
       </p:sp>
+      <p:pic>
+        <p:nvPicPr>
+          <p:cNvPr id="12" name="Picture 11" descr="zundamon-an.gif"/>
+          <p:cNvPicPr>
+            <a:picLocks noChangeAspect="1"/>
+          </p:cNvPicPr>
+          <p:nvPr/>
+        </p:nvPicPr>
+        <p:blipFill>
+          <a:blip r:embed="rId5"/>
+          <a:stretch>
+            <a:fillRect/>
+          </a:stretch>
+        </p:blipFill>
+        <p:spPr>
+          <a:xfrm>
+            <a:off x="7726680" y="3726180"/>
+            <a:ext cx="1371600" cy="1371600"/>
+          </a:xfrm>
+          <a:prstGeom prst="rect">
+            <a:avLst/>
+          </a:prstGeom>
+        </p:spPr>
+      </p:pic>
     </p:spTree>
   </p:cSld>
   <p:clrMapOvr>

--- a/youtube_ranking_20260531.pptx
+++ b/youtube_ranking_20260531.pptx
@@ -3456,7 +3456,7 @@
                 </a:solidFill>
                 <a:latin typeface="Arial"/>
               </a:rPr>
-              <a:t>https://www.youtube.com/watch?v=dab8DsN4Lkw</a:t>
+              <a:t>https://www.youtube.com/watch?v=Vn7PhppVvkM</a:t>
             </a:r>
           </a:p>
         </p:txBody>
@@ -3492,7 +3492,7 @@
                 <a:latin typeface="Arial"/>
                 <a:hlinkClick r:id="rId4"/>
               </a:rPr>
-              <a:t>【4人実況】NGワードを言ったら「仲間が死ぬ」おもしろホラーゲーム『 Cursed Companions 』</a:t>
+              <a:t>【ヒカコレ】ヒカキン、初めてのトモコレ実況 #1『 トモダチコレクション わくわく生活 』</a:t>
             </a:r>
           </a:p>
         </p:txBody>
@@ -3527,7 +3527,7 @@
                 </a:solidFill>
                 <a:latin typeface="Arial"/>
               </a:rPr>
-              <a:t>📺  キヨ。</a:t>
+              <a:t>📺  HikakinGames</a:t>
             </a:r>
           </a:p>
         </p:txBody>
@@ -3562,7 +3562,7 @@
                 </a:solidFill>
                 <a:latin typeface="Arial"/>
               </a:rPr>
-              <a:t>👁 554,930  👍 17,246  💬 953  📈+461.9%</a:t>
+              <a:t>👁 192,207  👍 12,470  💬 759</a:t>
             </a:r>
           </a:p>
         </p:txBody>
@@ -3597,7 +3597,7 @@
                 </a:solidFill>
                 <a:latin typeface="Arial"/>
               </a:rPr>
-              <a:t>⏱ 1:21:05  ·  📅 公開39時間前</a:t>
+              <a:t>⏱ 1:37:22  ·  📅 公開-4時間前</a:t>
             </a:r>
           </a:p>
         </p:txBody>
@@ -3632,7 +3632,7 @@
                 </a:solidFill>
                 <a:latin typeface="Arial"/>
               </a:rPr>
-              <a:t>💡 公開1日で急上昇　50万再生の注目コンテンツ　前日比+461.9%の爆発的な伸び</a:t>
+              <a:t>💡 公開-4時間で急上昇入り！　10万再生突破の話題作　いいね率6.5%と視聴者の支持が非常に高い</a:t>
             </a:r>
           </a:p>
         </p:txBody>
@@ -3957,7 +3957,7 @@
                 </a:solidFill>
                 <a:latin typeface="Arial"/>
               </a:rPr>
-              <a:t>👁 925,951  👍 81,759  💬 6,339  ⏱ 3:52  📅 公開38時間前</a:t>
+              <a:t>👁 1,474,497  👍 92,589  💬 6,830  ⏱ 3:52  📅 公開38時間前</a:t>
             </a:r>
           </a:p>
         </p:txBody>
@@ -3992,7 +3992,7 @@
                 </a:solidFill>
                 <a:latin typeface="Arial"/>
               </a:rPr>
-              <a:t>💡 公開1日で急上昇　50万再生の注目コンテンツ　いいね率8.8%と視聴者の支持が非常に高い</a:t>
+              <a:t>💡 公開1日で急上昇　100万再生超の大ヒット　前日比+59.2%と急拡散中</a:t>
             </a:r>
           </a:p>
         </p:txBody>
@@ -4346,7 +4346,7 @@
                 </a:solidFill>
                 <a:latin typeface="Arial"/>
               </a:rPr>
-              <a:t>📺 やっさん2  👁 19,148,384  👍 158,046  ⏱ 0:10  📅 2025-08-09</a:t>
+              <a:t>📺 やっさん2  👁 19,148,652  👍 158,045  ⏱ 0:10  📅 2025-08-09</a:t>
             </a:r>
           </a:p>
         </p:txBody>
@@ -4580,7 +4580,7 @@
                 </a:solidFill>
                 <a:latin typeface="Arial"/>
               </a:rPr>
-              <a:t>📺 ネタ秒  👁 14,609,655  👍 41,772  ⏱ 0:17  📅 2025-09-26</a:t>
+              <a:t>📺 ネタ秒  👁 14,609,665  👍 41,769  ⏱ 0:17  📅 2025-09-26</a:t>
             </a:r>
           </a:p>
         </p:txBody>
@@ -4814,7 +4814,7 @@
                 </a:solidFill>
                 <a:latin typeface="Arial"/>
               </a:rPr>
-              <a:t>📺 ごっこ倶楽部のウラ垢 - STUDIO GOKKO -  👁 12,781,157  👍 170,545  ⏱ 1:28  📅 2025-04-14</a:t>
+              <a:t>📺 ごっこ倶楽部のウラ垢 - STUDIO GOKKO -  👁 12,781,190  👍 170,545  ⏱ 1:28  📅 2025-04-14</a:t>
             </a:r>
           </a:p>
         </p:txBody>
@@ -5048,7 +5048,7 @@
                 </a:solidFill>
                 <a:latin typeface="Arial"/>
               </a:rPr>
-              <a:t>📺 はるえもん  👁 11,709,055  👍 185,671  ⏱ 1:33  📅 2025-07-05</a:t>
+              <a:t>📺 はるえもん  👁 11,710,692  👍 185,707  ⏱ 1:33  📅 2025-07-05</a:t>
             </a:r>
           </a:p>
         </p:txBody>
@@ -5282,7 +5282,7 @@
                 </a:solidFill>
                 <a:latin typeface="Arial"/>
               </a:rPr>
-              <a:t>📺 やっさん2  👁 11,475,916  👍 132,365  ⏱ 0:18  📅 2025-11-01</a:t>
+              <a:t>📺 やっさん2  👁 11,477,780  👍 132,385  ⏱ 0:18  📅 2025-11-01</a:t>
             </a:r>
           </a:p>
         </p:txBody>
@@ -5553,7 +5553,7 @@
                 <a:latin typeface="Arial"/>
                 <a:hlinkClick r:id="rId3"/>
               </a:rPr>
-              <a:t>感動のダブルスイカ‼️ #スイカゲーム #ゲーム実況 #サワヤンゲームズ</a:t>
+              <a:t>たくさん食べてすくすく育つ！【MOD紹介】</a:t>
             </a:r>
           </a:p>
         </p:txBody>
@@ -5612,7 +5612,7 @@
                 </a:solidFill>
                 <a:latin typeface="Arial"/>
               </a:rPr>
-              <a:t>📺 にこみチャンネル  👁 20,447,411  👍 362,509  ⏱ 0:59  📅 2023-12-22</a:t>
+              <a:t>📺 ウッドリィ  👁 24,831,043  👍 378,717  ⏱ 0:37  📅 2024-09-30</a:t>
             </a:r>
           </a:p>
         </p:txBody>
@@ -5647,7 +5647,7 @@
                 </a:solidFill>
                 <a:latin typeface="Arial"/>
               </a:rPr>
-              <a:t>https://www.youtube.com/watch?v=mhCy0IgobIw</a:t>
+              <a:t>https://www.youtube.com/watch?v=DuEKgK2B2p8</a:t>
             </a:r>
           </a:p>
         </p:txBody>
@@ -5787,7 +5787,7 @@
                 <a:latin typeface="Arial"/>
                 <a:hlinkClick r:id="rId6"/>
               </a:rPr>
-              <a:t>全部ひっかかる人【しょぼんのアクション3D】 #ゲーム実況</a:t>
+              <a:t>感動のダブルスイカ‼️ #スイカゲーム #ゲーム実況 #サワヤンゲームズ</a:t>
             </a:r>
           </a:p>
         </p:txBody>
@@ -5846,7 +5846,7 @@
                 </a:solidFill>
                 <a:latin typeface="Arial"/>
               </a:rPr>
-              <a:t>📺 タン  👁 19,798,500  👍 389,762  ⏱ 1:00  📅 2023-09-28</a:t>
+              <a:t>📺 にこみチャンネル  👁 20,447,668  👍 362,505  ⏱ 0:59  📅 2023-12-22</a:t>
             </a:r>
           </a:p>
         </p:txBody>
@@ -5881,7 +5881,7 @@
                 </a:solidFill>
                 <a:latin typeface="Arial"/>
               </a:rPr>
-              <a:t>https://www.youtube.com/watch?v=XGbduoPa_-0</a:t>
+              <a:t>https://www.youtube.com/watch?v=mhCy0IgobIw</a:t>
             </a:r>
           </a:p>
         </p:txBody>
@@ -6021,7 +6021,7 @@
                 <a:latin typeface="Arial"/>
                 <a:hlinkClick r:id="rId9"/>
               </a:rPr>
-              <a:t>見たことの無い落ち方をする配信者#葉 #ゲーム実況 #切り抜き #onlyup</a:t>
+              <a:t>全部ひっかかる人【しょぼんのアクション3D】 #ゲーム実況</a:t>
             </a:r>
           </a:p>
         </p:txBody>
@@ -6080,7 +6080,7 @@
                 </a:solidFill>
                 <a:latin typeface="Arial"/>
               </a:rPr>
-              <a:t>📺 葉ちゅべ  👁 18,456,839  👍 350,951  ⏱ 0:38  📅 2023-07-07</a:t>
+              <a:t>📺 タン  👁 19,798,766  👍 389,758  ⏱ 1:00  📅 2023-09-28</a:t>
             </a:r>
           </a:p>
         </p:txBody>
@@ -6115,7 +6115,7 @@
                 </a:solidFill>
                 <a:latin typeface="Arial"/>
               </a:rPr>
-              <a:t>https://www.youtube.com/watch?v=0cjKg-Z3xak</a:t>
+              <a:t>https://www.youtube.com/watch?v=XGbduoPa_-0</a:t>
             </a:r>
           </a:p>
         </p:txBody>
@@ -6255,7 +6255,7 @@
                 <a:latin typeface="Arial"/>
                 <a:hlinkClick r:id="rId12"/>
               </a:rPr>
-              <a:t>世界一の脱出ゲーム中にドッキリ【Human: Fall Flat】</a:t>
+              <a:t>見たことの無い落ち方をする配信者#葉 #ゲーム実況 #切り抜き #onlyup</a:t>
             </a:r>
           </a:p>
         </p:txBody>
@@ -6314,7 +6314,7 @@
                 </a:solidFill>
                 <a:latin typeface="Arial"/>
               </a:rPr>
-              <a:t>📺 まいぜんシスターズ  👁 12,035,797  👍 45,400  ⏱ 10:03  📅 2019-03-03</a:t>
+              <a:t>📺 葉ちゅべ  👁 18,537,801  👍 352,156  ⏱ 0:38  📅 2023-07-07</a:t>
             </a:r>
           </a:p>
         </p:txBody>
@@ -6349,7 +6349,7 @@
                 </a:solidFill>
                 <a:latin typeface="Arial"/>
               </a:rPr>
-              <a:t>https://www.youtube.com/watch?v=F3C59iyfYPo</a:t>
+              <a:t>https://www.youtube.com/watch?v=0cjKg-Z3xak</a:t>
             </a:r>
           </a:p>
         </p:txBody>
@@ -6548,7 +6548,7 @@
                 </a:solidFill>
                 <a:latin typeface="Arial"/>
               </a:rPr>
-              <a:t>📺 ドズル社  👁 11,665,219  👍 150,068  ⏱ 0:24  📅 2024-03-30</a:t>
+              <a:t>📺 ドズル社  👁 11,684,359  👍 150,166  ⏱ 0:24  📅 2024-03-30</a:t>
             </a:r>
           </a:p>
         </p:txBody>
@@ -6819,7 +6819,7 @@
                 <a:latin typeface="Arial"/>
                 <a:hlinkClick r:id="rId3"/>
               </a:rPr>
-              <a:t>ヒグチアイ / 悪魔の子 (アニメスペシャルVer.) | Ai Higuchi “…</a:t>
+              <a:t>TVアニメ『呪術廻戦』第2期「懐玉・玉折」ノンクレジットOPムービー／OPテーマ：キ…</a:t>
             </a:r>
           </a:p>
         </p:txBody>
@@ -6878,7 +6878,7 @@
                 </a:solidFill>
                 <a:latin typeface="Arial"/>
               </a:rPr>
-              <a:t>📺 ヒグチアイ  👁 212,588,725  👍 1,996,721  ⏱ 3:50  📅 2022-01-24</a:t>
+              <a:t>📺 TOHO animation チャンネル  👁 141,571,734  👍 0  ⏱ 1:31  📅 2023-07-07</a:t>
             </a:r>
           </a:p>
         </p:txBody>
@@ -6913,7 +6913,7 @@
                 </a:solidFill>
                 <a:latin typeface="Arial"/>
               </a:rPr>
-              <a:t>https://www.youtube.com/watch?v=WPl10ZrhCtk</a:t>
+              <a:t>https://www.youtube.com/watch?v=gcgKUcJKxIs</a:t>
             </a:r>
           </a:p>
         </p:txBody>
@@ -7053,7 +7053,7 @@
                 <a:latin typeface="Arial"/>
                 <a:hlinkClick r:id="rId6"/>
               </a:rPr>
-              <a:t>TVアニメ『呪術廻戦』第2期「懐玉・玉折」ノンクレジットOPムービー／OPテーマ：キ…</a:t>
+              <a:t>Mrs. GREEN APPLE「ライラック」MV - TVアニメ『忘却バッテリー』…</a:t>
             </a:r>
           </a:p>
         </p:txBody>
@@ -7112,7 +7112,7 @@
                 </a:solidFill>
                 <a:latin typeface="Arial"/>
               </a:rPr>
-              <a:t>📺 TOHO animation チャンネル  👁 141,454,225  👍 0  ⏱ 1:31  📅 2023-07-07</a:t>
+              <a:t>📺 Mrs. GREEN APPLE  👁 53,032,027  👍 180,394  ⏱ 4:53  📅 2024-07-04</a:t>
             </a:r>
           </a:p>
         </p:txBody>
@@ -7147,7 +7147,7 @@
                 </a:solidFill>
                 <a:latin typeface="Arial"/>
               </a:rPr>
-              <a:t>https://www.youtube.com/watch?v=gcgKUcJKxIs</a:t>
+              <a:t>https://www.youtube.com/watch?v=-NFhRWhkp7I</a:t>
             </a:r>
           </a:p>
         </p:txBody>
@@ -7287,7 +7287,7 @@
                 <a:latin typeface="Arial"/>
                 <a:hlinkClick r:id="rId9"/>
               </a:rPr>
-              <a:t>Mrs. GREEN APPLE「ライラック」MV - TVアニメ『忘却バッテリー』…</a:t>
+              <a:t>バスボールを使ってみよう！#アニメキッズ</a:t>
             </a:r>
           </a:p>
         </p:txBody>
@@ -7346,7 +7346,7 @@
                 </a:solidFill>
                 <a:latin typeface="Arial"/>
               </a:rPr>
-              <a:t>📺 Mrs. GREEN APPLE  👁 52,971,309  👍 180,328  ⏱ 4:53  📅 2024-07-04</a:t>
+              <a:t>📺 アニメキッズanimekids  👁 44,881,735  👍 0  ⏱ 29:47  📅 2017-09-15</a:t>
             </a:r>
           </a:p>
         </p:txBody>
@@ -7381,7 +7381,7 @@
                 </a:solidFill>
                 <a:latin typeface="Arial"/>
               </a:rPr>
-              <a:t>https://www.youtube.com/watch?v=-NFhRWhkp7I</a:t>
+              <a:t>https://www.youtube.com/watch?v=TFYnqEqeGqY</a:t>
             </a:r>
           </a:p>
         </p:txBody>
@@ -7521,7 +7521,7 @@
                 <a:latin typeface="Arial"/>
                 <a:hlinkClick r:id="rId12"/>
               </a:rPr>
-              <a:t>バスボールを使ってみよう！#アニメキッズ</a:t>
+              <a:t>アイナ・ジ・エンド / 革命道中 - On The Way × TVアニメ『ダンダダ…</a:t>
             </a:r>
           </a:p>
         </p:txBody>
@@ -7580,7 +7580,7 @@
                 </a:solidFill>
                 <a:latin typeface="Arial"/>
               </a:rPr>
-              <a:t>📺 アニメキッズanimekids  👁 44,867,430  👍 0  ⏱ 29:47  📅 2017-09-15</a:t>
+              <a:t>📺 アイナ・ジ・エンド Official  👁 43,696,901  👍 186,593  ⏱ 3:22  📅 2025-08-20</a:t>
             </a:r>
           </a:p>
         </p:txBody>
@@ -7615,7 +7615,7 @@
                 </a:solidFill>
                 <a:latin typeface="Arial"/>
               </a:rPr>
-              <a:t>https://www.youtube.com/watch?v=TFYnqEqeGqY</a:t>
+              <a:t>https://www.youtube.com/watch?v=ScWlFcYn_FI</a:t>
             </a:r>
           </a:p>
         </p:txBody>
@@ -7755,7 +7755,7 @@
                 <a:latin typeface="Arial"/>
                 <a:hlinkClick r:id="rId15"/>
               </a:rPr>
-              <a:t>アイナ・ジ・エンド / 革命道中 - On The Way × TVアニメ『ダンダダ…</a:t>
+              <a:t>TVアニメ『呪術廻戦』第3期「死滅回游 前編」ノンクレジットOPムービー／OPテーマ…</a:t>
             </a:r>
           </a:p>
         </p:txBody>
@@ -7814,7 +7814,7 @@
                 </a:solidFill>
                 <a:latin typeface="Arial"/>
               </a:rPr>
-              <a:t>📺 アイナ・ジ・エンド Official  👁 43,608,659  👍 186,428  ⏱ 3:22  📅 2025-08-20</a:t>
+              <a:t>📺 TOHO animation チャンネル  👁 35,327,904  👍 518,864  ⏱ 1:31  📅 2026-01-09</a:t>
             </a:r>
           </a:p>
         </p:txBody>
@@ -7849,7 +7849,7 @@
                 </a:solidFill>
                 <a:latin typeface="Arial"/>
               </a:rPr>
-              <a:t>https://www.youtube.com/watch?v=ScWlFcYn_FI</a:t>
+              <a:t>https://www.youtube.com/watch?v=Xr032EhUDPw</a:t>
             </a:r>
           </a:p>
         </p:txBody>
@@ -8085,7 +8085,7 @@
                 <a:latin typeface="Arial"/>
                 <a:hlinkClick r:id="rId3"/>
               </a:rPr>
-              <a:t>#film #映画red #恋愛 #映画紹介 #ドラマ #movie #映画</a:t>
+              <a:t>歌舞伎町タワーの日本一高い映画館「109シネマズプレミアム新宿」を正直レビュー！</a:t>
             </a:r>
           </a:p>
         </p:txBody>
@@ -8144,7 +8144,7 @@
                 </a:solidFill>
                 <a:latin typeface="Arial"/>
               </a:rPr>
-              <a:t>📺 ドゥックの映画レビューへ  👁 5,595,359  👍 34,340  ⏱ 1:41  📅 2026-05-21</a:t>
+              <a:t>📺 正直レビュー 🍰🍛  👁 6,803,555  👍 119,497  ⏱ 1:00  📅 2025-03-15</a:t>
             </a:r>
           </a:p>
         </p:txBody>
@@ -8179,7 +8179,7 @@
                 </a:solidFill>
                 <a:latin typeface="Arial"/>
               </a:rPr>
-              <a:t>https://www.youtube.com/watch?v=pMTUitjC-48</a:t>
+              <a:t>https://www.youtube.com/watch?v=2a1YM7MCXng</a:t>
             </a:r>
           </a:p>
         </p:txBody>
@@ -8378,7 +8378,7 @@
                 </a:solidFill>
                 <a:latin typeface="Arial"/>
               </a:rPr>
-              <a:t>📺 KABUKU. / 市川團十郎。  👁 3,492,603  👍 45,059  ⏱ 17:48  📅 2025-07-12</a:t>
+              <a:t>📺 KABUKU. / 市川團十郎。  👁 3,493,051  👍 45,062  ⏱ 17:48  📅 2025-07-12</a:t>
             </a:r>
           </a:p>
         </p:txBody>
@@ -8553,7 +8553,7 @@
                 <a:latin typeface="Arial"/>
                 <a:hlinkClick r:id="rId9"/>
               </a:rPr>
-              <a:t>秘技、ナルト投げ!! #映画 #タンポポ #伊丹十三 #映画レビュー #ラーメン #…</a:t>
+              <a:t>名作映画を見た感想を嘘ついてる奴は誰だ！映画人狼バトル開始！</a:t>
             </a:r>
           </a:p>
         </p:txBody>
@@ -8612,7 +8612,7 @@
                 </a:solidFill>
                 <a:latin typeface="Arial"/>
               </a:rPr>
-              <a:t>📺 max leo  👁 2,839,491  👍 16,585  ⏱ 0:58  📅 2025-12-19</a:t>
+              <a:t>📺 東海オンエア  👁 3,353,576  👍 29,918  ⏱ 34:45  📅 2024-09-26</a:t>
             </a:r>
           </a:p>
         </p:txBody>
@@ -8647,7 +8647,7 @@
                 </a:solidFill>
                 <a:latin typeface="Arial"/>
               </a:rPr>
-              <a:t>https://www.youtube.com/watch?v=IDdcUb3zyYQ</a:t>
+              <a:t>https://www.youtube.com/watch?v=KWYewgdSAOI</a:t>
             </a:r>
           </a:p>
         </p:txBody>
@@ -8787,7 +8787,7 @@
                 <a:latin typeface="Arial"/>
                 <a:hlinkClick r:id="rId12"/>
               </a:rPr>
-              <a:t>女性300人に聞いたつまらないジブリ作品ランキング　#shorts #映画 #解説 …</a:t>
+              <a:t>ディズニー１００周年のゴミ『ウィッシュ』レビュー</a:t>
             </a:r>
           </a:p>
         </p:txBody>
@@ -8846,7 +8846,7 @@
                 </a:solidFill>
                 <a:latin typeface="Arial"/>
               </a:rPr>
-              <a:t>📺 ゾノの映画トーク  👁 2,199,288  👍 33,530  ⏱ 0:47  📅 2024-03-27</a:t>
+              <a:t>📺 ホッカイロレン  👁 3,298,182  👍 43,489  ⏱ 12:56  📅 2023-12-19</a:t>
             </a:r>
           </a:p>
         </p:txBody>
@@ -8881,7 +8881,7 @@
                 </a:solidFill>
                 <a:latin typeface="Arial"/>
               </a:rPr>
-              <a:t>https://www.youtube.com/watch?v=6YwedUNbpdQ</a:t>
+              <a:t>https://www.youtube.com/watch?v=HQDUEU-Zhyc</a:t>
             </a:r>
           </a:p>
         </p:txBody>
@@ -9021,7 +9021,7 @@
                 <a:latin typeface="Arial"/>
                 <a:hlinkClick r:id="rId15"/>
               </a:rPr>
-              <a:t>#film #映画red #movie #恋愛 #映画紹介 #ドラマ #映画</a:t>
+              <a:t>【2ch有益スレ】今まで見た映画の中で「一番最悪だった映画」挙げてけｗ</a:t>
             </a:r>
           </a:p>
         </p:txBody>
@@ -9080,7 +9080,7 @@
                 </a:solidFill>
                 <a:latin typeface="Arial"/>
               </a:rPr>
-              <a:t>📺 ドゥックの映画レビューへ  👁 2,151,169  👍 22,187  ⏱ 2:56  📅 2026-05-22</a:t>
+              <a:t>📺 2ch有益プラネット【ゆっくり解説】  👁 3,001,727  👍 35,762  ⏱ 0:59  📅 2023-10-19</a:t>
             </a:r>
           </a:p>
         </p:txBody>
@@ -9115,7 +9115,7 @@
                 </a:solidFill>
                 <a:latin typeface="Arial"/>
               </a:rPr>
-              <a:t>https://www.youtube.com/watch?v=hDRG1-qk3bs</a:t>
+              <a:t>https://www.youtube.com/watch?v=J4JTp1tNrkk</a:t>
             </a:r>
           </a:p>
         </p:txBody>
@@ -9294,7 +9294,7 @@
                 </a:solidFill>
                 <a:latin typeface="Arial"/>
               </a:rPr>
-              <a:t>https://www.youtube.com/watch?v=mLa7akRDml4</a:t>
+              <a:t>https://www.youtube.com/watch?v=DLOPIksIO-o</a:t>
             </a:r>
           </a:p>
         </p:txBody>
@@ -9330,7 +9330,7 @@
                 <a:latin typeface="Arial"/>
                 <a:hlinkClick r:id="rId4"/>
               </a:rPr>
-              <a:t>【検証】初心者が8時間ルールに関与し続けたらXP2000に到達できるのか？【スプラ13日目】</a:t>
+              <a:t>FNCS メジャー1 サミット DAY 2</a:t>
             </a:r>
           </a:p>
         </p:txBody>
@@ -9365,7 +9365,7 @@
                 </a:solidFill>
                 <a:latin typeface="Arial"/>
               </a:rPr>
-              <a:t>📺  GON</a:t>
+              <a:t>📺  フォートナイト 公式</a:t>
             </a:r>
           </a:p>
         </p:txBody>
@@ -9400,7 +9400,7 @@
                 </a:solidFill>
                 <a:latin typeface="Arial"/>
               </a:rPr>
-              <a:t>👁 124,660  👍 3,486  💬 485</a:t>
+              <a:t>👁 352,627  👍 4,407  💬 207</a:t>
             </a:r>
           </a:p>
         </p:txBody>
@@ -9435,7 +9435,7 @@
                 </a:solidFill>
                 <a:latin typeface="Arial"/>
               </a:rPr>
-              <a:t>⏱ 1:02:21  ·  📅 公開22時間前</a:t>
+              <a:t>⏱ 5:06:54  ·  📅 公開5時間前</a:t>
             </a:r>
           </a:p>
         </p:txBody>
@@ -9470,7 +9470,7 @@
                 </a:solidFill>
                 <a:latin typeface="Arial"/>
               </a:rPr>
-              <a:t>💡 公開22時間で急上昇入り！　10万再生突破の話題作　いいね率2.8%と好評価</a:t>
+              <a:t>💡 公開5時間で急上昇入り！　10万再生突破の話題作</a:t>
             </a:r>
           </a:p>
         </p:txBody>
@@ -9673,7 +9673,7 @@
                 </a:solidFill>
                 <a:latin typeface="Arial"/>
               </a:rPr>
-              <a:t>https://www.youtube.com/watch?v=SlQR9iu09bQ</a:t>
+              <a:t>https://www.youtube.com/watch?v=NzVf-KJx2fU</a:t>
             </a:r>
           </a:p>
         </p:txBody>
@@ -9709,7 +9709,7 @@
                 <a:latin typeface="Arial"/>
                 <a:hlinkClick r:id="rId4"/>
               </a:rPr>
-              <a:t>SON TUNG M-TP x TYGA | COME MY WAY | OFFICIAL MUSIC VIDEO</a:t>
+              <a:t>SEKAI NO OWARI「炎と森のカーニバル」from「INSOMNIA TRAIN」</a:t>
             </a:r>
           </a:p>
         </p:txBody>
@@ -9744,7 +9744,7 @@
                 </a:solidFill>
                 <a:latin typeface="Arial"/>
               </a:rPr>
-              <a:t>📺  Sơn Tùng M-TP Official</a:t>
+              <a:t>📺  SEKAI NO OWARI</a:t>
             </a:r>
           </a:p>
         </p:txBody>
@@ -9779,7 +9779,7 @@
                 </a:solidFill>
                 <a:latin typeface="Arial"/>
               </a:rPr>
-              <a:t>👁 15,669,932  👍 1,050,566  💬 140,528  📈+25.2%</a:t>
+              <a:t>👁 100,555  👍 6,190  💬 515</a:t>
             </a:r>
           </a:p>
         </p:txBody>
@@ -9814,7 +9814,7 @@
                 </a:solidFill>
                 <a:latin typeface="Arial"/>
               </a:rPr>
-              <a:t>⏱ 4:18  ·  📅 公開60時間前</a:t>
+              <a:t>⏱ 5:22  ·  📅 公開14時間前</a:t>
             </a:r>
           </a:p>
         </p:txBody>
@@ -9849,7 +9849,7 @@
                 </a:solidFill>
                 <a:latin typeface="Arial"/>
               </a:rPr>
-              <a:t>💡 公開2日で急上昇　500万再生超の超バズ動画　前日比+25.2%で着実に成長</a:t>
+              <a:t>💡 公開14時間で急上昇入り！　10万再生突破の話題作　いいね率6.2%と視聴者の支持が非常に高い</a:t>
             </a:r>
           </a:p>
         </p:txBody>
@@ -10052,7 +10052,7 @@
                 </a:solidFill>
                 <a:latin typeface="Arial"/>
               </a:rPr>
-              <a:t>https://www.youtube.com/watch?v=K-jNtieSLiU</a:t>
+              <a:t>https://www.youtube.com/watch?v=xHE16FwEHMo</a:t>
             </a:r>
           </a:p>
         </p:txBody>
@@ -10088,7 +10088,7 @@
                 <a:latin typeface="Arial"/>
                 <a:hlinkClick r:id="rId4"/>
               </a:rPr>
-              <a:t>FNCS メジャー1 サミット DAY 1</a:t>
+              <a:t>【神回】Xで220万再生されたスプラでおかしくなってしまった男がヤバすぎるww【スプラ14日目】</a:t>
             </a:r>
           </a:p>
         </p:txBody>
@@ -10123,7 +10123,7 @@
                 </a:solidFill>
                 <a:latin typeface="Arial"/>
               </a:rPr>
-              <a:t>📺  フォートナイト 公式</a:t>
+              <a:t>📺  GON</a:t>
             </a:r>
           </a:p>
         </p:txBody>
@@ -10158,7 +10158,7 @@
                 </a:solidFill>
                 <a:latin typeface="Arial"/>
               </a:rPr>
-              <a:t>👁 285,418  👍 4,697  💬 126</a:t>
+              <a:t>👁 126,251  👍 3,696  💬 483</a:t>
             </a:r>
           </a:p>
         </p:txBody>
@@ -10193,7 +10193,7 @@
                 </a:solidFill>
                 <a:latin typeface="Arial"/>
               </a:rPr>
-              <a:t>⏱ 5:30:41  ·  📅 公開28時間前</a:t>
+              <a:t>⏱ 35:31  ·  📅 公開-1時間前</a:t>
             </a:r>
           </a:p>
         </p:txBody>
@@ -10228,7 +10228,7 @@
                 </a:solidFill>
                 <a:latin typeface="Arial"/>
               </a:rPr>
-              <a:t>💡 公開1日で急上昇　10万再生突破の話題作</a:t>
+              <a:t>💡 公開-1時間で急上昇入り！　10万再生突破の話題作　いいね率2.9%と好評価</a:t>
             </a:r>
           </a:p>
         </p:txBody>
@@ -10431,7 +10431,7 @@
                 </a:solidFill>
                 <a:latin typeface="Arial"/>
               </a:rPr>
-              <a:t>https://www.youtube.com/watch?v=83C3TZ4Zm_o</a:t>
+              <a:t>https://www.youtube.com/watch?v=dXsTd3xZi5k</a:t>
             </a:r>
           </a:p>
         </p:txBody>
@@ -10467,7 +10467,7 @@
                 <a:latin typeface="Arial"/>
                 <a:hlinkClick r:id="rId4"/>
               </a:rPr>
-              <a:t>aespa 에스파 'LEMONADE' MV</a:t>
+              <a:t>きゃりーぱみゅぱみゅ - キミに100パーセント / THE FIRST TAKE</a:t>
             </a:r>
           </a:p>
         </p:txBody>
@@ -10502,7 +10502,7 @@
                 </a:solidFill>
                 <a:latin typeface="Arial"/>
               </a:rPr>
-              <a:t>📺  SMTOWN</a:t>
+              <a:t>📺  THE FIRST TAKE</a:t>
             </a:r>
           </a:p>
         </p:txBody>
@@ -10537,7 +10537,7 @@
                 </a:solidFill>
                 <a:latin typeface="Arial"/>
               </a:rPr>
-              <a:t>👁 8,773,185  👍 446,547  💬 27,295  📈+111.9%</a:t>
+              <a:t>👁 1,248,580  👍 61,661  💬 2,615  📈+96.2%</a:t>
             </a:r>
           </a:p>
         </p:txBody>
@@ -10572,7 +10572,7 @@
                 </a:solidFill>
                 <a:latin typeface="Arial"/>
               </a:rPr>
-              <a:t>⏱ 3:12  ·  📅 公開45時間前</a:t>
+              <a:t>⏱ 4:39  ·  📅 公開36時間前</a:t>
             </a:r>
           </a:p>
         </p:txBody>
@@ -10607,7 +10607,7 @@
                 </a:solidFill>
                 <a:latin typeface="Arial"/>
               </a:rPr>
-              <a:t>💡 公開1日で急上昇　500万再生超の超バズ動画　前日比+111.9%と急拡散中</a:t>
+              <a:t>💡 公開1日で急上昇　100万再生超の大ヒット　前日比+96.2%と急拡散中</a:t>
             </a:r>
           </a:p>
         </p:txBody>
@@ -10810,7 +10810,7 @@
                 </a:solidFill>
                 <a:latin typeface="Arial"/>
               </a:rPr>
-              <a:t>https://www.youtube.com/watch?v=-bQgJsOGyYo</a:t>
+              <a:t>https://www.youtube.com/watch?v=iQDax_3lUfw</a:t>
             </a:r>
           </a:p>
         </p:txBody>
@@ -10846,7 +10846,7 @@
                 <a:latin typeface="Arial"/>
                 <a:hlinkClick r:id="rId4"/>
               </a:rPr>
-              <a:t>ゾンビだらけの世界を船に乗って生き残る</a:t>
+              <a:t>【本配信】#にじパブジ大運動会【PUBG MOBILE】</a:t>
             </a:r>
           </a:p>
         </p:txBody>
@@ -10881,7 +10881,7 @@
                 </a:solidFill>
                 <a:latin typeface="Arial"/>
               </a:rPr>
-              <a:t>📺  まいぜんシスターズ</a:t>
+              <a:t>📺  にじさんじ</a:t>
             </a:r>
           </a:p>
         </p:txBody>
@@ -10916,7 +10916,7 @@
                 </a:solidFill>
                 <a:latin typeface="Arial"/>
               </a:rPr>
-              <a:t>👁 152,701  👍 2,458  💬 113</a:t>
+              <a:t>👁 659,702  👍 12,887  💬 64</a:t>
             </a:r>
           </a:p>
         </p:txBody>
@@ -10951,7 +10951,7 @@
                 </a:solidFill>
                 <a:latin typeface="Arial"/>
               </a:rPr>
-              <a:t>⏱ 33:44  ·  📅 公開23時間前</a:t>
+              <a:t>⏱ 3:59:59  ·  📅 公開13時間前</a:t>
             </a:r>
           </a:p>
         </p:txBody>
@@ -10986,7 +10986,7 @@
                 </a:solidFill>
                 <a:latin typeface="Arial"/>
               </a:rPr>
-              <a:t>💡 公開23時間で急上昇入り！　10万再生突破の話題作</a:t>
+              <a:t>💡 公開13時間で急上昇入り！　50万再生の注目コンテンツ</a:t>
             </a:r>
           </a:p>
         </p:txBody>
@@ -11189,7 +11189,7 @@
                 </a:solidFill>
                 <a:latin typeface="Arial"/>
               </a:rPr>
-              <a:t>https://www.youtube.com/watch?v=Wx4-lfsgUlo</a:t>
+              <a:t>https://www.youtube.com/watch?v=ARj1adoUoEU</a:t>
             </a:r>
           </a:p>
         </p:txBody>
@@ -11225,7 +11225,7 @@
                 <a:latin typeface="Arial"/>
                 <a:hlinkClick r:id="rId4"/>
               </a:rPr>
-              <a:t>なにわ男子 - Celebrate [Official Music Video]</a:t>
+              <a:t>飛ぶ時 / Vaundy：MUSIC VIDEO</a:t>
             </a:r>
           </a:p>
         </p:txBody>
@@ -11260,7 +11260,7 @@
                 </a:solidFill>
                 <a:latin typeface="Arial"/>
               </a:rPr>
-              <a:t>📺  なにわ男子</a:t>
+              <a:t>📺  Vaundy</a:t>
             </a:r>
           </a:p>
         </p:txBody>
@@ -11295,7 +11295,7 @@
                 </a:solidFill>
                 <a:latin typeface="Arial"/>
               </a:rPr>
-              <a:t>👁 346,432  👍 35,255  💬 5,356  📈+594.8%</a:t>
+              <a:t>👁 365,870  👍 17,798  💬 389</a:t>
             </a:r>
           </a:p>
         </p:txBody>
@@ -11330,7 +11330,7 @@
                 </a:solidFill>
                 <a:latin typeface="Arial"/>
               </a:rPr>
-              <a:t>⏱ 4:04  ·  📅 公開38時間前</a:t>
+              <a:t>⏱ 4:15  ·  📅 公開14時間前</a:t>
             </a:r>
           </a:p>
         </p:txBody>
@@ -11365,7 +11365,7 @@
                 </a:solidFill>
                 <a:latin typeface="Arial"/>
               </a:rPr>
-              <a:t>💡 公開1日で急上昇　10万再生突破の話題作　前日比+594.8%の爆発的な伸び</a:t>
+              <a:t>💡 公開14時間で急上昇入り！　10万再生突破の話題作　いいね率4.9%と好評価</a:t>
             </a:r>
           </a:p>
         </p:txBody>
@@ -11568,7 +11568,7 @@
                 </a:solidFill>
                 <a:latin typeface="Arial"/>
               </a:rPr>
-              <a:t>https://www.youtube.com/watch?v=lDSBe18Sn18</a:t>
+              <a:t>https://www.youtube.com/watch?v=mJjSqWiR8g0</a:t>
             </a:r>
           </a:p>
         </p:txBody>
@@ -11604,7 +11604,7 @@
                 <a:latin typeface="Arial"/>
                 <a:hlinkClick r:id="rId4"/>
               </a:rPr>
-              <a:t>【マインクラフト】全ての行動がポイントになる可能性がある世界【日常組】</a:t>
+              <a:t>MOBの中身が見れるマインクラフト【 マイクラ / マインクラフト 】</a:t>
             </a:r>
           </a:p>
         </p:txBody>
@@ -11639,7 +11639,7 @@
                 </a:solidFill>
                 <a:latin typeface="Arial"/>
               </a:rPr>
-              <a:t>📺  日常組</a:t>
+              <a:t>📺  ウォーターチャレンジ</a:t>
             </a:r>
           </a:p>
         </p:txBody>
@@ -11674,7 +11674,7 @@
                 </a:solidFill>
                 <a:latin typeface="Arial"/>
               </a:rPr>
-              <a:t>👁 506,812  👍 18,507  💬 681  📈+213.7%</a:t>
+              <a:t>👁 164,874  👍 3,352  💬 47</a:t>
             </a:r>
           </a:p>
         </p:txBody>
@@ -11709,7 +11709,7 @@
                 </a:solidFill>
                 <a:latin typeface="Arial"/>
               </a:rPr>
-              <a:t>⏱ 54:36  ·  📅 公開41時間前</a:t>
+              <a:t>⏱ 21:17  ·  📅 公開0時間前</a:t>
             </a:r>
           </a:p>
         </p:txBody>
@@ -11744,7 +11744,7 @@
                 </a:solidFill>
                 <a:latin typeface="Arial"/>
               </a:rPr>
-              <a:t>💡 公開1日で急上昇　50万再生の注目コンテンツ　前日比+213.7%の爆発的な伸び</a:t>
+              <a:t>💡 公開0時間で急上昇入り！　10万再生突破の話題作　いいね率2.0%と好評価</a:t>
             </a:r>
           </a:p>
         </p:txBody>
@@ -11947,7 +11947,7 @@
                 </a:solidFill>
                 <a:latin typeface="Arial"/>
               </a:rPr>
-              <a:t>https://www.youtube.com/watch?v=dXsTd3xZi5k</a:t>
+              <a:t>https://www.youtube.com/watch?v=4PHkIkKjI14</a:t>
             </a:r>
           </a:p>
         </p:txBody>
@@ -11983,7 +11983,7 @@
                 <a:latin typeface="Arial"/>
                 <a:hlinkClick r:id="rId4"/>
               </a:rPr>
-              <a:t>きゃりーぱみゅぱみゅ - キミに100パーセント / THE FIRST TAKE</a:t>
+              <a:t>REAL-T - "  脛の傷 "  (Prod. 理貴)</a:t>
             </a:r>
           </a:p>
         </p:txBody>
@@ -12018,7 +12018,7 @@
                 </a:solidFill>
                 <a:latin typeface="Arial"/>
               </a:rPr>
-              <a:t>📺  THE FIRST TAKE</a:t>
+              <a:t>📺  REAL-T</a:t>
             </a:r>
           </a:p>
         </p:txBody>
@@ -12053,7 +12053,7 @@
                 </a:solidFill>
                 <a:latin typeface="Arial"/>
               </a:rPr>
-              <a:t>👁 636,281  👍 38,795  💬 1,810</a:t>
+              <a:t>👁 47,095  👍 2,360  💬 298</a:t>
             </a:r>
           </a:p>
         </p:txBody>
@@ -12088,7 +12088,7 @@
                 </a:solidFill>
                 <a:latin typeface="Arial"/>
               </a:rPr>
-              <a:t>⏱ 4:39  ·  📅 公開36時間前</a:t>
+              <a:t>⏱ 2:07  ·  📅 公開-1時間前</a:t>
             </a:r>
           </a:p>
         </p:txBody>
@@ -12123,7 +12123,7 @@
                 </a:solidFill>
                 <a:latin typeface="Arial"/>
               </a:rPr>
-              <a:t>💡 公開1日で急上昇　50万再生の注目コンテンツ　いいね率6.1%と視聴者の支持が非常に高い</a:t>
+              <a:t>💡 公開-1時間で急上昇入り！　急上昇中の新興コンテンツ　いいね率5.0%と視聴者の支持が非常に高い</a:t>
             </a:r>
           </a:p>
         </p:txBody>

--- a/youtube_ranking_20260531.pptx
+++ b/youtube_ranking_20260531.pptx
@@ -3597,7 +3597,7 @@
                 </a:solidFill>
                 <a:latin typeface="Arial"/>
               </a:rPr>
-              <a:t>⏱ 1:37:22  ·  📅 公開-4時間前</a:t>
+              <a:t>⏱ 1:37:22  ·  📅 公開-3時間前</a:t>
             </a:r>
           </a:p>
         </p:txBody>
@@ -3632,7 +3632,7 @@
                 </a:solidFill>
                 <a:latin typeface="Arial"/>
               </a:rPr>
-              <a:t>💡 公開-4時間で急上昇入り！　10万再生突破の話題作　いいね率6.5%と視聴者の支持が非常に高い</a:t>
+              <a:t>💡 公開-3時間で急上昇入り！　10万再生突破の話題作　いいね率6.5%と視聴者の支持が非常に高い</a:t>
             </a:r>
           </a:p>
         </p:txBody>
@@ -3883,7 +3883,7 @@
         </p:blipFill>
         <p:spPr>
           <a:xfrm>
-            <a:off x="7818120" y="3639312"/>
+            <a:off x="91440" y="3639312"/>
             <a:ext cx="1005840" cy="1005840"/>
           </a:xfrm>
           <a:prstGeom prst="rect">
@@ -3957,7 +3957,7 @@
                 </a:solidFill>
                 <a:latin typeface="Arial"/>
               </a:rPr>
-              <a:t>👁 1,474,497  👍 92,589  💬 6,830  ⏱ 3:52  📅 公開38時間前</a:t>
+              <a:t>👁 1,474,497  👍 92,589  💬 6,830  ⏱ 3:52  📅 公開39時間前</a:t>
             </a:r>
           </a:p>
         </p:txBody>
@@ -9435,7 +9435,7 @@
                 </a:solidFill>
                 <a:latin typeface="Arial"/>
               </a:rPr>
-              <a:t>⏱ 5:06:54  ·  📅 公開5時間前</a:t>
+              <a:t>⏱ 5:06:54  ·  📅 公開6時間前</a:t>
             </a:r>
           </a:p>
         </p:txBody>
@@ -9470,7 +9470,7 @@
                 </a:solidFill>
                 <a:latin typeface="Arial"/>
               </a:rPr>
-              <a:t>💡 公開5時間で急上昇入り！　10万再生突破の話題作</a:t>
+              <a:t>💡 公開6時間で急上昇入り！　10万再生突破の話題作</a:t>
             </a:r>
           </a:p>
         </p:txBody>
@@ -9814,7 +9814,7 @@
                 </a:solidFill>
                 <a:latin typeface="Arial"/>
               </a:rPr>
-              <a:t>⏱ 5:22  ·  📅 公開14時間前</a:t>
+              <a:t>⏱ 5:22  ·  📅 公開15時間前</a:t>
             </a:r>
           </a:p>
         </p:txBody>
@@ -9849,7 +9849,7 @@
                 </a:solidFill>
                 <a:latin typeface="Arial"/>
               </a:rPr>
-              <a:t>💡 公開14時間で急上昇入り！　10万再生突破の話題作　いいね率6.2%と視聴者の支持が非常に高い</a:t>
+              <a:t>💡 公開15時間で急上昇入り！　10万再生突破の話題作　いいね率6.2%と視聴者の支持が非常に高い</a:t>
             </a:r>
           </a:p>
         </p:txBody>
@@ -10193,7 +10193,7 @@
                 </a:solidFill>
                 <a:latin typeface="Arial"/>
               </a:rPr>
-              <a:t>⏱ 35:31  ·  📅 公開-1時間前</a:t>
+              <a:t>⏱ 35:31  ·  📅 公開0時間前</a:t>
             </a:r>
           </a:p>
         </p:txBody>
@@ -10228,7 +10228,7 @@
                 </a:solidFill>
                 <a:latin typeface="Arial"/>
               </a:rPr>
-              <a:t>💡 公開-1時間で急上昇入り！　10万再生突破の話題作　いいね率2.9%と好評価</a:t>
+              <a:t>💡 公開0時間で急上昇入り！　10万再生突破の話題作　いいね率2.9%と好評価</a:t>
             </a:r>
           </a:p>
         </p:txBody>
@@ -10572,7 +10572,7 @@
                 </a:solidFill>
                 <a:latin typeface="Arial"/>
               </a:rPr>
-              <a:t>⏱ 4:39  ·  📅 公開36時間前</a:t>
+              <a:t>⏱ 4:39  ·  📅 公開37時間前</a:t>
             </a:r>
           </a:p>
         </p:txBody>
@@ -11330,7 +11330,7 @@
                 </a:solidFill>
                 <a:latin typeface="Arial"/>
               </a:rPr>
-              <a:t>⏱ 4:15  ·  📅 公開14時間前</a:t>
+              <a:t>⏱ 4:15  ·  📅 公開15時間前</a:t>
             </a:r>
           </a:p>
         </p:txBody>
@@ -11365,7 +11365,7 @@
                 </a:solidFill>
                 <a:latin typeface="Arial"/>
               </a:rPr>
-              <a:t>💡 公開14時間で急上昇入り！　10万再生突破の話題作　いいね率4.9%と好評価</a:t>
+              <a:t>💡 公開15時間で急上昇入り！　10万再生突破の話題作　いいね率4.9%と好評価</a:t>
             </a:r>
           </a:p>
         </p:txBody>
@@ -12088,7 +12088,7 @@
                 </a:solidFill>
                 <a:latin typeface="Arial"/>
               </a:rPr>
-              <a:t>⏱ 2:07  ·  📅 公開-1時間前</a:t>
+              <a:t>⏱ 2:07  ·  📅 公開0時間前</a:t>
             </a:r>
           </a:p>
         </p:txBody>
@@ -12123,7 +12123,7 @@
                 </a:solidFill>
                 <a:latin typeface="Arial"/>
               </a:rPr>
-              <a:t>💡 公開-1時間で急上昇入り！　急上昇中の新興コンテンツ　いいね率5.0%と視聴者の支持が非常に高い</a:t>
+              <a:t>💡 公開0時間で急上昇入り！　急上昇中の新興コンテンツ　いいね率5.0%と視聴者の支持が非常に高い</a:t>
             </a:r>
           </a:p>
         </p:txBody>
